--- a/ClipGenie_Stage_Deck.pptx
+++ b/ClipGenie_Stage_Deck.pptx
@@ -14,7 +14,6 @@
     <p:sldId id="262" r:id="rId13"/>
     <p:sldId id="263" r:id="rId14"/>
     <p:sldId id="264" r:id="rId15"/>
-    <p:sldId id="265" r:id="rId16"/>
   </p:sldIdLst>
   <p:sldSz cx="12191695" cy="6858000" type="screen4x3"/>
   <p:notesSz cx="6858000" cy="9144000"/>
@@ -3261,13 +3260,13 @@
               </a:spcAft>
             </a:pPr>
             <a:r>
-              <a:rPr sz="1600" b="1">
+              <a:rPr sz="1500" b="1">
                 <a:solidFill>
                   <a:srgbClr val="4F46E5"/>
                 </a:solidFill>
                 <a:latin typeface="Calibri"/>
               </a:rPr>
-              <a:t>CLIPGENIE</a:t>
+              <a:t>CLIPGENIE STUDIO</a:t>
             </a:r>
           </a:p>
           <a:p>
@@ -3688,769 +3687,6 @@
                 <a:latin typeface="Calibri"/>
               </a:rPr>
               <a:t>Proves mastery on a brand-new real-world scenario.</a:t>
-            </a:r>
-          </a:p>
-        </p:txBody>
-      </p:sp>
-    </p:spTree>
-  </p:cSld>
-  <p:clrMapOvr>
-    <a:masterClrMapping/>
-  </p:clrMapOvr>
-</p:sld>
-</file>
-
-<file path=ppt/slides/slide10.xml><?xml version="1.0" encoding="utf-8"?>
-<p:sld xmlns:a="http://schemas.openxmlformats.org/drawingml/2006/main" xmlns:p="http://schemas.openxmlformats.org/presentationml/2006/main" xmlns:r="http://schemas.openxmlformats.org/officeDocument/2006/relationships">
-  <p:cSld>
-    <p:spTree>
-      <p:nvGrpSpPr>
-        <p:cNvPr id="1" name=""/>
-        <p:cNvGrpSpPr/>
-        <p:nvPr/>
-      </p:nvGrpSpPr>
-      <p:grpSpPr/>
-      <p:sp>
-        <p:nvSpPr>
-          <p:cNvPr id="2" name="Rectangle 1"/>
-          <p:cNvSpPr/>
-          <p:nvPr/>
-        </p:nvSpPr>
-        <p:spPr>
-          <a:xfrm>
-            <a:off x="0" y="0"/>
-            <a:ext cx="12191695" cy="6858000"/>
-          </a:xfrm>
-          <a:prstGeom prst="rect">
-            <a:avLst/>
-          </a:prstGeom>
-          <a:solidFill>
-            <a:srgbClr val="F8FAFC"/>
-          </a:solidFill>
-          <a:ln>
-            <a:noFill/>
-          </a:ln>
-        </p:spPr>
-        <p:style>
-          <a:lnRef idx="1">
-            <a:schemeClr val="accent1"/>
-          </a:lnRef>
-          <a:fillRef idx="3">
-            <a:schemeClr val="accent1"/>
-          </a:fillRef>
-          <a:effectRef idx="2">
-            <a:schemeClr val="accent1"/>
-          </a:effectRef>
-          <a:fontRef idx="minor">
-            <a:schemeClr val="lt1"/>
-          </a:fontRef>
-        </p:style>
-        <p:txBody>
-          <a:bodyPr rtlCol="0" anchor="ctr"/>
-          <a:lstStyle/>
-          <a:p>
-            <a:pPr algn="ctr"/>
-          </a:p>
-        </p:txBody>
-      </p:sp>
-      <p:sp>
-        <p:nvSpPr>
-          <p:cNvPr id="3" name="Rectangle 2"/>
-          <p:cNvSpPr/>
-          <p:nvPr/>
-        </p:nvSpPr>
-        <p:spPr>
-          <a:xfrm>
-            <a:off x="0" y="0"/>
-            <a:ext cx="12191695" cy="73152"/>
-          </a:xfrm>
-          <a:prstGeom prst="rect">
-            <a:avLst/>
-          </a:prstGeom>
-          <a:solidFill>
-            <a:srgbClr val="4F46E5"/>
-          </a:solidFill>
-          <a:ln>
-            <a:noFill/>
-          </a:ln>
-        </p:spPr>
-        <p:style>
-          <a:lnRef idx="1">
-            <a:schemeClr val="accent1"/>
-          </a:lnRef>
-          <a:fillRef idx="3">
-            <a:schemeClr val="accent1"/>
-          </a:fillRef>
-          <a:effectRef idx="2">
-            <a:schemeClr val="accent1"/>
-          </a:effectRef>
-          <a:fontRef idx="minor">
-            <a:schemeClr val="lt1"/>
-          </a:fontRef>
-        </p:style>
-        <p:txBody>
-          <a:bodyPr rtlCol="0" anchor="ctr"/>
-          <a:lstStyle/>
-          <a:p>
-            <a:pPr algn="ctr"/>
-          </a:p>
-        </p:txBody>
-      </p:sp>
-      <p:sp>
-        <p:nvSpPr>
-          <p:cNvPr id="4" name="Rounded Rectangle 3"/>
-          <p:cNvSpPr/>
-          <p:nvPr/>
-        </p:nvSpPr>
-        <p:spPr>
-          <a:xfrm>
-            <a:off x="685800" y="411480"/>
-            <a:ext cx="2286000" cy="347472"/>
-          </a:xfrm>
-          <a:prstGeom prst="roundRect">
-            <a:avLst>
-              <a:gd name="adj" fmla="val 40000"/>
-            </a:avLst>
-          </a:prstGeom>
-          <a:solidFill>
-            <a:srgbClr val="EEF2FF"/>
-          </a:solidFill>
-          <a:ln w="19050">
-            <a:solidFill>
-              <a:srgbClr val="A5B4FC"/>
-            </a:solidFill>
-          </a:ln>
-        </p:spPr>
-        <p:style>
-          <a:lnRef idx="1">
-            <a:schemeClr val="accent1"/>
-          </a:lnRef>
-          <a:fillRef idx="3">
-            <a:schemeClr val="accent1"/>
-          </a:fillRef>
-          <a:effectRef idx="2">
-            <a:schemeClr val="accent1"/>
-          </a:effectRef>
-          <a:fontRef idx="minor">
-            <a:schemeClr val="lt1"/>
-          </a:fontRef>
-        </p:style>
-        <p:txBody>
-          <a:bodyPr rtlCol="0" anchor="ctr" lIns="128016"/>
-          <a:lstStyle/>
-          <a:p>
-            <a:pPr algn="l">
-              <a:spcBef>
-                <a:spcPts val="0"/>
-              </a:spcBef>
-              <a:spcAft>
-                <a:spcPts val="0"/>
-              </a:spcAft>
-            </a:pPr>
-            <a:r>
-              <a:rPr sz="1100" b="1">
-                <a:solidFill>
-                  <a:srgbClr val="4F46E5"/>
-                </a:solidFill>
-                <a:latin typeface="Calibri"/>
-              </a:rPr>
-              <a:t>09 • LIVE DEMO</a:t>
-            </a:r>
-          </a:p>
-        </p:txBody>
-      </p:sp>
-      <p:sp>
-        <p:nvSpPr>
-          <p:cNvPr id="5" name="TextBox 4"/>
-          <p:cNvSpPr txBox="1"/>
-          <p:nvPr/>
-        </p:nvSpPr>
-        <p:spPr>
-          <a:xfrm>
-            <a:off x="9326880" y="411480"/>
-            <a:ext cx="2194560" cy="365760"/>
-          </a:xfrm>
-          <a:prstGeom prst="rect">
-            <a:avLst/>
-          </a:prstGeom>
-          <a:noFill/>
-        </p:spPr>
-        <p:txBody>
-          <a:bodyPr wrap="none">
-            <a:spAutoFit/>
-          </a:bodyPr>
-          <a:lstStyle/>
-          <a:p>
-            <a:pPr algn="r">
-              <a:spcBef>
-                <a:spcPts val="0"/>
-              </a:spcBef>
-              <a:spcAft>
-                <a:spcPts val="600"/>
-              </a:spcAft>
-            </a:pPr>
-            <a:r>
-              <a:rPr sz="1200" b="1">
-                <a:solidFill>
-                  <a:srgbClr val="64748B"/>
-                </a:solidFill>
-                <a:latin typeface="Calibri"/>
-              </a:rPr>
-              <a:t>ClipGenie  •  10 / 10</a:t>
-            </a:r>
-          </a:p>
-        </p:txBody>
-      </p:sp>
-      <p:sp>
-        <p:nvSpPr>
-          <p:cNvPr id="6" name="TextBox 5"/>
-          <p:cNvSpPr txBox="1"/>
-          <p:nvPr/>
-        </p:nvSpPr>
-        <p:spPr>
-          <a:xfrm>
-            <a:off x="685800" y="868680"/>
-            <a:ext cx="10789920" cy="685800"/>
-          </a:xfrm>
-          <a:prstGeom prst="rect">
-            <a:avLst/>
-          </a:prstGeom>
-          <a:noFill/>
-        </p:spPr>
-        <p:txBody>
-          <a:bodyPr wrap="square">
-            <a:spAutoFit/>
-          </a:bodyPr>
-          <a:lstStyle/>
-          <a:p>
-            <a:pPr algn="l">
-              <a:spcBef>
-                <a:spcPts val="0"/>
-              </a:spcBef>
-              <a:spcAft>
-                <a:spcPts val="400"/>
-              </a:spcAft>
-            </a:pPr>
-            <a:r>
-              <a:rPr sz="3400" b="1">
-                <a:solidFill>
-                  <a:srgbClr val="0F172A"/>
-                </a:solidFill>
-                <a:latin typeface="Calibri"/>
-              </a:rPr>
-              <a:t>Live Demonstration Walkthrough</a:t>
-            </a:r>
-          </a:p>
-        </p:txBody>
-      </p:sp>
-      <p:sp>
-        <p:nvSpPr>
-          <p:cNvPr id="7" name="TextBox 6"/>
-          <p:cNvSpPr txBox="1"/>
-          <p:nvPr/>
-        </p:nvSpPr>
-        <p:spPr>
-          <a:xfrm>
-            <a:off x="685800" y="1481328"/>
-            <a:ext cx="10789920" cy="411480"/>
-          </a:xfrm>
-          <a:prstGeom prst="rect">
-            <a:avLst/>
-          </a:prstGeom>
-          <a:noFill/>
-        </p:spPr>
-        <p:txBody>
-          <a:bodyPr wrap="square">
-            <a:spAutoFit/>
-          </a:bodyPr>
-          <a:lstStyle/>
-          <a:p>
-            <a:pPr algn="l">
-              <a:spcBef>
-                <a:spcPts val="0"/>
-              </a:spcBef>
-              <a:spcAft>
-                <a:spcPts val="0"/>
-              </a:spcAft>
-            </a:pPr>
-            <a:r>
-              <a:rPr sz="1700" b="0">
-                <a:solidFill>
-                  <a:srgbClr val="334155"/>
-                </a:solidFill>
-                <a:latin typeface="Calibri"/>
-              </a:rPr>
-              <a:t>Seeing ClipGenie in action on real video lectures.</a:t>
-            </a:r>
-          </a:p>
-        </p:txBody>
-      </p:sp>
-      <p:sp>
-        <p:nvSpPr>
-          <p:cNvPr id="8" name="Rounded Rectangle 7"/>
-          <p:cNvSpPr/>
-          <p:nvPr/>
-        </p:nvSpPr>
-        <p:spPr>
-          <a:xfrm>
-            <a:off x="685800" y="2103120"/>
-            <a:ext cx="3429000" cy="3429000"/>
-          </a:xfrm>
-          <a:prstGeom prst="roundRect">
-            <a:avLst>
-              <a:gd name="adj" fmla="val 4000"/>
-            </a:avLst>
-          </a:prstGeom>
-          <a:solidFill>
-            <a:srgbClr val="EEF2FF"/>
-          </a:solidFill>
-          <a:ln w="25400">
-            <a:solidFill>
-              <a:srgbClr val="A5B4FC"/>
-            </a:solidFill>
-          </a:ln>
-        </p:spPr>
-        <p:style>
-          <a:lnRef idx="1">
-            <a:schemeClr val="accent1"/>
-          </a:lnRef>
-          <a:fillRef idx="3">
-            <a:schemeClr val="accent1"/>
-          </a:fillRef>
-          <a:effectRef idx="2">
-            <a:schemeClr val="accent1"/>
-          </a:effectRef>
-          <a:fontRef idx="minor">
-            <a:schemeClr val="lt1"/>
-          </a:fontRef>
-        </p:style>
-        <p:txBody>
-          <a:bodyPr rtlCol="0" anchor="ctr"/>
-          <a:lstStyle/>
-          <a:p>
-            <a:pPr algn="ctr"/>
-          </a:p>
-        </p:txBody>
-      </p:sp>
-      <p:sp>
-        <p:nvSpPr>
-          <p:cNvPr id="9" name="TextBox 8"/>
-          <p:cNvSpPr txBox="1"/>
-          <p:nvPr/>
-        </p:nvSpPr>
-        <p:spPr>
-          <a:xfrm>
-            <a:off x="960120" y="2377440"/>
-            <a:ext cx="2880360" cy="2834640"/>
-          </a:xfrm>
-          <a:prstGeom prst="rect">
-            <a:avLst/>
-          </a:prstGeom>
-          <a:noFill/>
-        </p:spPr>
-        <p:txBody>
-          <a:bodyPr wrap="square">
-            <a:spAutoFit/>
-          </a:bodyPr>
-          <a:lstStyle/>
-          <a:p>
-            <a:pPr algn="l">
-              <a:spcBef>
-                <a:spcPts val="0"/>
-              </a:spcBef>
-              <a:spcAft>
-                <a:spcPts val="800"/>
-              </a:spcAft>
-            </a:pPr>
-            <a:r>
-              <a:rPr sz="1400" b="1">
-                <a:solidFill>
-                  <a:srgbClr val="4F46E5"/>
-                </a:solidFill>
-                <a:latin typeface="Calibri"/>
-              </a:rPr>
-              <a:t>DEMO 1</a:t>
-            </a:r>
-          </a:p>
-          <a:p>
-            <a:pPr algn="l">
-              <a:spcBef>
-                <a:spcPts val="0"/>
-              </a:spcBef>
-              <a:spcAft>
-                <a:spcPts val="1200"/>
-              </a:spcAft>
-            </a:pPr>
-            <a:r>
-              <a:rPr sz="2500" b="1">
-                <a:solidFill>
-                  <a:srgbClr val="0F172A"/>
-                </a:solidFill>
-                <a:latin typeface="Calibri"/>
-              </a:rPr>
-              <a:t>Load &amp; Watch Clip</a:t>
-            </a:r>
-          </a:p>
-          <a:p>
-            <a:pPr algn="l">
-              <a:spcBef>
-                <a:spcPts val="0"/>
-              </a:spcBef>
-              <a:spcAft>
-                <a:spcPts val="0"/>
-              </a:spcAft>
-            </a:pPr>
-            <a:r>
-              <a:rPr sz="1700" b="0">
-                <a:solidFill>
-                  <a:srgbClr val="334155"/>
-                </a:solidFill>
-                <a:latin typeface="Calibri"/>
-              </a:rPr>
-              <a:t>Switch or import a lecture &amp; play a clamped chapter.</a:t>
-            </a:r>
-          </a:p>
-        </p:txBody>
-      </p:sp>
-      <p:sp>
-        <p:nvSpPr>
-          <p:cNvPr id="10" name="Rounded Rectangle 9"/>
-          <p:cNvSpPr/>
-          <p:nvPr/>
-        </p:nvSpPr>
-        <p:spPr>
-          <a:xfrm>
-            <a:off x="4379976" y="2103120"/>
-            <a:ext cx="3429000" cy="3429000"/>
-          </a:xfrm>
-          <a:prstGeom prst="roundRect">
-            <a:avLst>
-              <a:gd name="adj" fmla="val 4000"/>
-            </a:avLst>
-          </a:prstGeom>
-          <a:solidFill>
-            <a:srgbClr val="FFFBEB"/>
-          </a:solidFill>
-          <a:ln w="25400">
-            <a:solidFill>
-              <a:srgbClr val="FCD34D"/>
-            </a:solidFill>
-          </a:ln>
-        </p:spPr>
-        <p:style>
-          <a:lnRef idx="1">
-            <a:schemeClr val="accent1"/>
-          </a:lnRef>
-          <a:fillRef idx="3">
-            <a:schemeClr val="accent1"/>
-          </a:fillRef>
-          <a:effectRef idx="2">
-            <a:schemeClr val="accent1"/>
-          </a:effectRef>
-          <a:fontRef idx="minor">
-            <a:schemeClr val="lt1"/>
-          </a:fontRef>
-        </p:style>
-        <p:txBody>
-          <a:bodyPr rtlCol="0" anchor="ctr"/>
-          <a:lstStyle/>
-          <a:p>
-            <a:pPr algn="ctr"/>
-          </a:p>
-        </p:txBody>
-      </p:sp>
-      <p:sp>
-        <p:nvSpPr>
-          <p:cNvPr id="11" name="TextBox 10"/>
-          <p:cNvSpPr txBox="1"/>
-          <p:nvPr/>
-        </p:nvSpPr>
-        <p:spPr>
-          <a:xfrm>
-            <a:off x="4654296" y="2377440"/>
-            <a:ext cx="2880360" cy="2834640"/>
-          </a:xfrm>
-          <a:prstGeom prst="rect">
-            <a:avLst/>
-          </a:prstGeom>
-          <a:noFill/>
-        </p:spPr>
-        <p:txBody>
-          <a:bodyPr wrap="square">
-            <a:spAutoFit/>
-          </a:bodyPr>
-          <a:lstStyle/>
-          <a:p>
-            <a:pPr algn="l">
-              <a:spcBef>
-                <a:spcPts val="0"/>
-              </a:spcBef>
-              <a:spcAft>
-                <a:spcPts val="800"/>
-              </a:spcAft>
-            </a:pPr>
-            <a:r>
-              <a:rPr sz="1400" b="1">
-                <a:solidFill>
-                  <a:srgbClr val="D97706"/>
-                </a:solidFill>
-                <a:latin typeface="Calibri"/>
-              </a:rPr>
-              <a:t>DEMO 2</a:t>
-            </a:r>
-          </a:p>
-          <a:p>
-            <a:pPr algn="l">
-              <a:spcBef>
-                <a:spcPts val="0"/>
-              </a:spcBef>
-              <a:spcAft>
-                <a:spcPts val="1200"/>
-              </a:spcAft>
-            </a:pPr>
-            <a:r>
-              <a:rPr sz="2500" b="1">
-                <a:solidFill>
-                  <a:srgbClr val="0F172A"/>
-                </a:solidFill>
-                <a:latin typeface="Calibri"/>
-              </a:rPr>
-              <a:t>Diagnose &amp; Guardrail</a:t>
-            </a:r>
-          </a:p>
-          <a:p>
-            <a:pPr algn="l">
-              <a:spcBef>
-                <a:spcPts val="0"/>
-              </a:spcBef>
-              <a:spcAft>
-                <a:spcPts val="0"/>
-              </a:spcAft>
-            </a:pPr>
-            <a:r>
-              <a:rPr sz="1700" b="0">
-                <a:solidFill>
-                  <a:srgbClr val="334155"/>
-                </a:solidFill>
-                <a:latin typeface="Calibri"/>
-              </a:rPr>
-              <a:t>Test a vague guess, a cheat attempt &amp; a partial answer.</a:t>
-            </a:r>
-          </a:p>
-        </p:txBody>
-      </p:sp>
-      <p:sp>
-        <p:nvSpPr>
-          <p:cNvPr id="12" name="Rounded Rectangle 11"/>
-          <p:cNvSpPr/>
-          <p:nvPr/>
-        </p:nvSpPr>
-        <p:spPr>
-          <a:xfrm>
-            <a:off x="8074152" y="2103120"/>
-            <a:ext cx="3429000" cy="3429000"/>
-          </a:xfrm>
-          <a:prstGeom prst="roundRect">
-            <a:avLst>
-              <a:gd name="adj" fmla="val 4000"/>
-            </a:avLst>
-          </a:prstGeom>
-          <a:solidFill>
-            <a:srgbClr val="ECFDF5"/>
-          </a:solidFill>
-          <a:ln w="25400">
-            <a:solidFill>
-              <a:srgbClr val="6EE7B7"/>
-            </a:solidFill>
-          </a:ln>
-        </p:spPr>
-        <p:style>
-          <a:lnRef idx="1">
-            <a:schemeClr val="accent1"/>
-          </a:lnRef>
-          <a:fillRef idx="3">
-            <a:schemeClr val="accent1"/>
-          </a:fillRef>
-          <a:effectRef idx="2">
-            <a:schemeClr val="accent1"/>
-          </a:effectRef>
-          <a:fontRef idx="minor">
-            <a:schemeClr val="lt1"/>
-          </a:fontRef>
-        </p:style>
-        <p:txBody>
-          <a:bodyPr rtlCol="0" anchor="ctr"/>
-          <a:lstStyle/>
-          <a:p>
-            <a:pPr algn="ctr"/>
-          </a:p>
-        </p:txBody>
-      </p:sp>
-      <p:sp>
-        <p:nvSpPr>
-          <p:cNvPr id="13" name="TextBox 12"/>
-          <p:cNvSpPr txBox="1"/>
-          <p:nvPr/>
-        </p:nvSpPr>
-        <p:spPr>
-          <a:xfrm>
-            <a:off x="8348472" y="2377440"/>
-            <a:ext cx="2880360" cy="2834640"/>
-          </a:xfrm>
-          <a:prstGeom prst="rect">
-            <a:avLst/>
-          </a:prstGeom>
-          <a:noFill/>
-        </p:spPr>
-        <p:txBody>
-          <a:bodyPr wrap="square">
-            <a:spAutoFit/>
-          </a:bodyPr>
-          <a:lstStyle/>
-          <a:p>
-            <a:pPr algn="l">
-              <a:spcBef>
-                <a:spcPts val="0"/>
-              </a:spcBef>
-              <a:spcAft>
-                <a:spcPts val="800"/>
-              </a:spcAft>
-            </a:pPr>
-            <a:r>
-              <a:rPr sz="1400" b="1">
-                <a:solidFill>
-                  <a:srgbClr val="059669"/>
-                </a:solidFill>
-                <a:latin typeface="Calibri"/>
-              </a:rPr>
-              <a:t>DEMO 3</a:t>
-            </a:r>
-          </a:p>
-          <a:p>
-            <a:pPr algn="l">
-              <a:spcBef>
-                <a:spcPts val="0"/>
-              </a:spcBef>
-              <a:spcAft>
-                <a:spcPts val="1200"/>
-              </a:spcAft>
-            </a:pPr>
-            <a:r>
-              <a:rPr sz="2500" b="1">
-                <a:solidFill>
-                  <a:srgbClr val="0F172A"/>
-                </a:solidFill>
-                <a:latin typeface="Calibri"/>
-              </a:rPr>
-              <a:t>Retry &amp; Transfer</a:t>
-            </a:r>
-          </a:p>
-          <a:p>
-            <a:pPr algn="l">
-              <a:spcBef>
-                <a:spcPts val="0"/>
-              </a:spcBef>
-              <a:spcAft>
-                <a:spcPts val="0"/>
-              </a:spcAft>
-            </a:pPr>
-            <a:r>
-              <a:rPr sz="1700" b="0">
-                <a:solidFill>
-                  <a:srgbClr val="334155"/>
-                </a:solidFill>
-                <a:latin typeface="Calibri"/>
-              </a:rPr>
-              <a:t>Close the gap (+Delta) &amp; pass the Cold Transfer Check.</a:t>
-            </a:r>
-          </a:p>
-        </p:txBody>
-      </p:sp>
-      <p:sp>
-        <p:nvSpPr>
-          <p:cNvPr id="14" name="Rounded Rectangle 13"/>
-          <p:cNvSpPr/>
-          <p:nvPr/>
-        </p:nvSpPr>
-        <p:spPr>
-          <a:xfrm>
-            <a:off x="685800" y="5806440"/>
-            <a:ext cx="10817352" cy="658368"/>
-          </a:xfrm>
-          <a:prstGeom prst="roundRect">
-            <a:avLst>
-              <a:gd name="adj" fmla="val 15000"/>
-            </a:avLst>
-          </a:prstGeom>
-          <a:solidFill>
-            <a:srgbClr val="ECFDF5"/>
-          </a:solidFill>
-          <a:ln w="19050">
-            <a:solidFill>
-              <a:srgbClr val="6EE7B7"/>
-            </a:solidFill>
-          </a:ln>
-        </p:spPr>
-        <p:style>
-          <a:lnRef idx="1">
-            <a:schemeClr val="accent1"/>
-          </a:lnRef>
-          <a:fillRef idx="3">
-            <a:schemeClr val="accent1"/>
-          </a:fillRef>
-          <a:effectRef idx="2">
-            <a:schemeClr val="accent1"/>
-          </a:effectRef>
-          <a:fontRef idx="minor">
-            <a:schemeClr val="lt1"/>
-          </a:fontRef>
-        </p:style>
-        <p:txBody>
-          <a:bodyPr rtlCol="0" anchor="ctr"/>
-          <a:lstStyle/>
-          <a:p>
-            <a:pPr algn="ctr"/>
-          </a:p>
-        </p:txBody>
-      </p:sp>
-      <p:sp>
-        <p:nvSpPr>
-          <p:cNvPr id="15" name="TextBox 14"/>
-          <p:cNvSpPr txBox="1"/>
-          <p:nvPr/>
-        </p:nvSpPr>
-        <p:spPr>
-          <a:xfrm>
-            <a:off x="914400" y="5925312"/>
-            <a:ext cx="10332720" cy="411480"/>
-          </a:xfrm>
-          <a:prstGeom prst="rect">
-            <a:avLst/>
-          </a:prstGeom>
-          <a:noFill/>
-        </p:spPr>
-        <p:txBody>
-          <a:bodyPr wrap="none">
-            <a:spAutoFit/>
-          </a:bodyPr>
-          <a:lstStyle/>
-          <a:p>
-            <a:pPr algn="ctr">
-              <a:spcBef>
-                <a:spcPts val="0"/>
-              </a:spcBef>
-              <a:spcAft>
-                <a:spcPts val="0"/>
-              </a:spcAft>
-            </a:pPr>
-            <a:r>
-              <a:rPr sz="1600" b="1">
-                <a:solidFill>
-                  <a:srgbClr val="059669"/>
-                </a:solidFill>
-                <a:latin typeface="Calibri"/>
-              </a:rPr>
-              <a:t>"Don't just watch it. Explain it, close the gap, and prove you know it."   •   Thank You!</a:t>
             </a:r>
           </a:p>
         </p:txBody>
@@ -4568,7 +3804,7 @@
         <p:spPr>
           <a:xfrm>
             <a:off x="685800" y="411480"/>
-            <a:ext cx="2286000" cy="347472"/>
+            <a:ext cx="2377440" cy="347472"/>
           </a:xfrm>
           <a:prstGeom prst="roundRect">
             <a:avLst>
@@ -4659,7 +3895,7 @@
                 </a:solidFill>
                 <a:latin typeface="Calibri"/>
               </a:rPr>
-              <a:t>ClipGenie  •  02 / 10</a:t>
+              <a:t>ClipGenie  •  02 / 09</a:t>
             </a:r>
           </a:p>
         </p:txBody>
@@ -5331,7 +4567,7 @@
         <p:spPr>
           <a:xfrm>
             <a:off x="685800" y="411480"/>
-            <a:ext cx="2286000" cy="347472"/>
+            <a:ext cx="2377440" cy="347472"/>
           </a:xfrm>
           <a:prstGeom prst="roundRect">
             <a:avLst>
@@ -5380,7 +4616,7 @@
                 </a:solidFill>
                 <a:latin typeface="Calibri"/>
               </a:rPr>
-              <a:t>02 • RESEARCH &amp; STATS</a:t>
+              <a:t>02 • RESEARCH &amp; BRAIN SCIENCE</a:t>
             </a:r>
           </a:p>
         </p:txBody>
@@ -5422,7 +4658,7 @@
                 </a:solidFill>
                 <a:latin typeface="Calibri"/>
               </a:rPr>
-              <a:t>ClipGenie  •  03 / 10</a:t>
+              <a:t>ClipGenie  •  03 / 09</a:t>
             </a:r>
           </a:p>
         </p:txBody>
@@ -6094,7 +5330,7 @@
         <p:spPr>
           <a:xfrm>
             <a:off x="685800" y="411480"/>
-            <a:ext cx="2286000" cy="347472"/>
+            <a:ext cx="2377440" cy="347472"/>
           </a:xfrm>
           <a:prstGeom prst="roundRect">
             <a:avLst>
@@ -6185,7 +5421,7 @@
                 </a:solidFill>
                 <a:latin typeface="Calibri"/>
               </a:rPr>
-              <a:t>ClipGenie  •  04 / 10</a:t>
+              <a:t>ClipGenie  •  04 / 09</a:t>
             </a:r>
           </a:p>
         </p:txBody>
@@ -6806,7 +6042,7 @@
         <p:spPr>
           <a:xfrm>
             <a:off x="685800" y="411480"/>
-            <a:ext cx="2286000" cy="347472"/>
+            <a:ext cx="2377440" cy="347472"/>
           </a:xfrm>
           <a:prstGeom prst="roundRect">
             <a:avLst>
@@ -6897,7 +6133,7 @@
                 </a:solidFill>
                 <a:latin typeface="Calibri"/>
               </a:rPr>
-              <a:t>ClipGenie  •  05 / 10</a:t>
+              <a:t>ClipGenie  •  05 / 09</a:t>
             </a:r>
           </a:p>
         </p:txBody>
@@ -7696,7 +6932,7 @@
         <p:spPr>
           <a:xfrm>
             <a:off x="685800" y="411480"/>
-            <a:ext cx="2286000" cy="347472"/>
+            <a:ext cx="2377440" cy="347472"/>
           </a:xfrm>
           <a:prstGeom prst="roundRect">
             <a:avLst>
@@ -7787,7 +7023,7 @@
                 </a:solidFill>
                 <a:latin typeface="Calibri"/>
               </a:rPr>
-              <a:t>ClipGenie  •  06 / 10</a:t>
+              <a:t>ClipGenie  •  06 / 09</a:t>
             </a:r>
           </a:p>
         </p:txBody>
@@ -7913,7 +7149,7 @@
                           </a:solidFill>
                           <a:latin typeface="Calibri"/>
                         </a:rPr>
-                        <a:t>Feature</a:t>
+                        <a:t>Dimension</a:t>
                       </a:r>
                     </a:p>
                   </a:txBody>
@@ -8115,7 +7351,7 @@
                           </a:solidFill>
                           <a:latin typeface="Calibri"/>
                         </a:rPr>
-                        <a:t>N/A</a:t>
+                        <a:t>Not Applicable</a:t>
                       </a:r>
                     </a:p>
                   </a:txBody>
@@ -8646,7 +7882,7 @@
         <p:spPr>
           <a:xfrm>
             <a:off x="685800" y="411480"/>
-            <a:ext cx="2286000" cy="347472"/>
+            <a:ext cx="2377440" cy="347472"/>
           </a:xfrm>
           <a:prstGeom prst="roundRect">
             <a:avLst>
@@ -8737,7 +7973,7 @@
                 </a:solidFill>
                 <a:latin typeface="Calibri"/>
               </a:rPr>
-              <a:t>ClipGenie  •  07 / 10</a:t>
+              <a:t>ClipGenie  •  07 / 09</a:t>
             </a:r>
           </a:p>
         </p:txBody>
@@ -9310,7 +8546,7 @@
                 </a:solidFill>
                 <a:latin typeface="Calibri"/>
               </a:rPr>
-              <a:t>Diagnostic Guard</a:t>
+              <a:t>Diagnostic Engine</a:t>
             </a:r>
           </a:p>
           <a:p>
@@ -9329,7 +8565,7 @@
                 </a:solidFill>
                 <a:latin typeface="Calibri"/>
               </a:rPr>
-              <a:t>Grades student explanation &amp; blocks answer spoilers.</a:t>
+              <a:t>Grades student explanation &amp; guides gap closure.</a:t>
             </a:r>
           </a:p>
         </p:txBody>
@@ -9536,7 +8772,7 @@
         <p:spPr>
           <a:xfrm>
             <a:off x="685800" y="411480"/>
-            <a:ext cx="2286000" cy="347472"/>
+            <a:ext cx="2377440" cy="347472"/>
           </a:xfrm>
           <a:prstGeom prst="roundRect">
             <a:avLst>
@@ -9585,7 +8821,7 @@
                 </a:solidFill>
                 <a:latin typeface="Calibri"/>
               </a:rPr>
-              <a:t>07 • GUARDRAILS</a:t>
+              <a:t>07 • FUTURE ROADMAP</a:t>
             </a:r>
           </a:p>
         </p:txBody>
@@ -9627,7 +8863,7 @@
                 </a:solidFill>
                 <a:latin typeface="Calibri"/>
               </a:rPr>
-              <a:t>ClipGenie  •  08 / 10</a:t>
+              <a:t>ClipGenie  •  08 / 09</a:t>
             </a:r>
           </a:p>
         </p:txBody>
@@ -9669,7 +8905,7 @@
                 </a:solidFill>
                 <a:latin typeface="Calibri"/>
               </a:rPr>
-              <a:t>Accurate Evaluation &amp; Anti-Shortcut Protection</a:t>
+              <a:t>Where ClipGenie Goes Next</a:t>
             </a:r>
           </a:p>
         </p:txBody>
@@ -9711,7 +8947,7 @@
                 </a:solidFill>
                 <a:latin typeface="Calibri"/>
               </a:rPr>
-              <a:t>How ClipGenie handles vague guesses, cheat attempts, and real explanations.</a:t>
+              <a:t>Scaling from an individual study studio to classroom-wide active learning.</a:t>
             </a:r>
           </a:p>
         </p:txBody>
@@ -9725,7 +8961,134 @@
         <p:spPr>
           <a:xfrm>
             <a:off x="685800" y="2103120"/>
-            <a:ext cx="3429000" cy="3429000"/>
+            <a:ext cx="2542032" cy="3429000"/>
+          </a:xfrm>
+          <a:prstGeom prst="roundRect">
+            <a:avLst>
+              <a:gd name="adj" fmla="val 4000"/>
+            </a:avLst>
+          </a:prstGeom>
+          <a:solidFill>
+            <a:srgbClr val="EEF2FF"/>
+          </a:solidFill>
+          <a:ln w="25400">
+            <a:solidFill>
+              <a:srgbClr val="A5B4FC"/>
+            </a:solidFill>
+          </a:ln>
+        </p:spPr>
+        <p:style>
+          <a:lnRef idx="1">
+            <a:schemeClr val="accent1"/>
+          </a:lnRef>
+          <a:fillRef idx="3">
+            <a:schemeClr val="accent1"/>
+          </a:fillRef>
+          <a:effectRef idx="2">
+            <a:schemeClr val="accent1"/>
+          </a:effectRef>
+          <a:fontRef idx="minor">
+            <a:schemeClr val="lt1"/>
+          </a:fontRef>
+        </p:style>
+        <p:txBody>
+          <a:bodyPr rtlCol="0" anchor="ctr"/>
+          <a:lstStyle/>
+          <a:p>
+            <a:pPr algn="ctr"/>
+          </a:p>
+        </p:txBody>
+      </p:sp>
+      <p:sp>
+        <p:nvSpPr>
+          <p:cNvPr id="9" name="TextBox 8"/>
+          <p:cNvSpPr txBox="1"/>
+          <p:nvPr/>
+        </p:nvSpPr>
+        <p:spPr>
+          <a:xfrm>
+            <a:off x="905256" y="2377440"/>
+            <a:ext cx="2103120" cy="2834640"/>
+          </a:xfrm>
+          <a:prstGeom prst="rect">
+            <a:avLst/>
+          </a:prstGeom>
+          <a:noFill/>
+        </p:spPr>
+        <p:txBody>
+          <a:bodyPr wrap="square">
+            <a:spAutoFit/>
+          </a:bodyPr>
+          <a:lstStyle/>
+          <a:p>
+            <a:pPr algn="l">
+              <a:spcBef>
+                <a:spcPts val="0"/>
+              </a:spcBef>
+              <a:spcAft>
+                <a:spcPts val="800"/>
+              </a:spcAft>
+            </a:pPr>
+            <a:r>
+              <a:rPr sz="1200" b="1">
+                <a:solidFill>
+                  <a:srgbClr val="4F46E5"/>
+                </a:solidFill>
+                <a:latin typeface="Calibri"/>
+              </a:rPr>
+              <a:t>01 • VOICE VIVA</a:t>
+            </a:r>
+          </a:p>
+          <a:p>
+            <a:pPr algn="l">
+              <a:spcBef>
+                <a:spcPts val="0"/>
+              </a:spcBef>
+              <a:spcAft>
+                <a:spcPts val="1200"/>
+              </a:spcAft>
+            </a:pPr>
+            <a:r>
+              <a:rPr sz="2200" b="1">
+                <a:solidFill>
+                  <a:srgbClr val="0F172A"/>
+                </a:solidFill>
+                <a:latin typeface="Calibri"/>
+              </a:rPr>
+              <a:t>Spoken Practice</a:t>
+            </a:r>
+          </a:p>
+          <a:p>
+            <a:pPr algn="l">
+              <a:spcBef>
+                <a:spcPts val="0"/>
+              </a:spcBef>
+              <a:spcAft>
+                <a:spcPts val="0"/>
+              </a:spcAft>
+            </a:pPr>
+            <a:r>
+              <a:rPr sz="1600" b="0">
+                <a:solidFill>
+                  <a:srgbClr val="334155"/>
+                </a:solidFill>
+                <a:latin typeface="Calibri"/>
+              </a:rPr>
+              <a:t>Explain concepts out loud via microphone.</a:t>
+            </a:r>
+          </a:p>
+        </p:txBody>
+      </p:sp>
+      <p:sp>
+        <p:nvSpPr>
+          <p:cNvPr id="10" name="Rounded Rectangle 9"/>
+          <p:cNvSpPr/>
+          <p:nvPr/>
+        </p:nvSpPr>
+        <p:spPr>
+          <a:xfrm>
+            <a:off x="3447288" y="2103120"/>
+            <a:ext cx="2542032" cy="3429000"/>
           </a:xfrm>
           <a:prstGeom prst="roundRect">
             <a:avLst>
@@ -9765,14 +9128,14 @@
       </p:sp>
       <p:sp>
         <p:nvSpPr>
-          <p:cNvPr id="9" name="TextBox 8"/>
+          <p:cNvPr id="11" name="TextBox 10"/>
           <p:cNvSpPr txBox="1"/>
           <p:nvPr/>
         </p:nvSpPr>
         <p:spPr>
           <a:xfrm>
-            <a:off x="960120" y="2377440"/>
-            <a:ext cx="2880360" cy="2834640"/>
+            <a:off x="3666744" y="2377440"/>
+            <a:ext cx="2103120" cy="2834640"/>
           </a:xfrm>
           <a:prstGeom prst="rect">
             <a:avLst/>
@@ -9794,13 +9157,13 @@
               </a:spcAft>
             </a:pPr>
             <a:r>
-              <a:rPr sz="1300" b="1">
+              <a:rPr sz="1200" b="1">
                 <a:solidFill>
                   <a:srgbClr val="D97706"/>
                 </a:solidFill>
                 <a:latin typeface="Calibri"/>
               </a:rPr>
-              <a:t>VAGUE GUESS</a:t>
+              <a:t>02 • SPACED REVIEW</a:t>
             </a:r>
           </a:p>
           <a:p>
@@ -9813,46 +9176,46 @@
               </a:spcAft>
             </a:pPr>
             <a:r>
-              <a:rPr sz="2400" b="1">
+              <a:rPr sz="2200" b="1">
                 <a:solidFill>
                   <a:srgbClr val="0F172A"/>
                 </a:solidFill>
                 <a:latin typeface="Calibri"/>
               </a:rPr>
-              <a:t>"AI is helpful"</a:t>
-            </a:r>
-          </a:p>
-          <a:p>
-            <a:pPr algn="l">
-              <a:spcBef>
-                <a:spcPts val="0"/>
-              </a:spcBef>
-              <a:spcAft>
-                <a:spcPts val="0"/>
-              </a:spcAft>
-            </a:pPr>
-            <a:r>
-              <a:rPr sz="1650" b="0">
+              <a:t>1–3–7 Day Queue</a:t>
+            </a:r>
+          </a:p>
+          <a:p>
+            <a:pPr algn="l">
+              <a:spcBef>
+                <a:spcPts val="0"/>
+              </a:spcBef>
+              <a:spcAft>
+                <a:spcPts val="0"/>
+              </a:spcAft>
+            </a:pPr>
+            <a:r>
+              <a:rPr sz="1600" b="0">
                 <a:solidFill>
                   <a:srgbClr val="334155"/>
                 </a:solidFill>
                 <a:latin typeface="Calibri"/>
               </a:rPr>
-              <a:t>Score: 10%  •  No false credit for analogies not written; gives non-spoiler gap cues.</a:t>
-            </a:r>
-          </a:p>
-        </p:txBody>
-      </p:sp>
-      <p:sp>
-        <p:nvSpPr>
-          <p:cNvPr id="10" name="Rounded Rectangle 9"/>
+              <a:t>Auto-schedules weak video clips to beat forgetting.</a:t>
+            </a:r>
+          </a:p>
+        </p:txBody>
+      </p:sp>
+      <p:sp>
+        <p:nvSpPr>
+          <p:cNvPr id="12" name="Rounded Rectangle 11"/>
           <p:cNvSpPr/>
           <p:nvPr/>
         </p:nvSpPr>
         <p:spPr>
           <a:xfrm>
-            <a:off x="4379976" y="2103120"/>
-            <a:ext cx="3429000" cy="3429000"/>
+            <a:off x="6208776" y="2103120"/>
+            <a:ext cx="2542032" cy="3429000"/>
           </a:xfrm>
           <a:prstGeom prst="roundRect">
             <a:avLst>
@@ -9892,14 +9255,14 @@
       </p:sp>
       <p:sp>
         <p:nvSpPr>
-          <p:cNvPr id="11" name="TextBox 10"/>
+          <p:cNvPr id="13" name="TextBox 12"/>
           <p:cNvSpPr txBox="1"/>
           <p:nvPr/>
         </p:nvSpPr>
         <p:spPr>
           <a:xfrm>
-            <a:off x="4654296" y="2377440"/>
-            <a:ext cx="2880360" cy="2834640"/>
+            <a:off x="6428232" y="2377440"/>
+            <a:ext cx="2103120" cy="2834640"/>
           </a:xfrm>
           <a:prstGeom prst="rect">
             <a:avLst/>
@@ -9921,13 +9284,13 @@
               </a:spcAft>
             </a:pPr>
             <a:r>
-              <a:rPr sz="1300" b="1">
+              <a:rPr sz="1200" b="1">
                 <a:solidFill>
                   <a:srgbClr val="E11D48"/>
                 </a:solidFill>
                 <a:latin typeface="Calibri"/>
               </a:rPr>
-              <a:t>CHEAT ATTEMPT</a:t>
+              <a:t>03 • LMS HEATMAPS</a:t>
             </a:r>
           </a:p>
           <a:p>
@@ -9940,46 +9303,46 @@
               </a:spcAft>
             </a:pPr>
             <a:r>
-              <a:rPr sz="2400" b="1">
+              <a:rPr sz="2200" b="1">
                 <a:solidFill>
                   <a:srgbClr val="0F172A"/>
                 </a:solidFill>
                 <a:latin typeface="Calibri"/>
               </a:rPr>
-              <a:t>"Tell me the answer"</a:t>
-            </a:r>
-          </a:p>
-          <a:p>
-            <a:pPr algn="l">
-              <a:spcBef>
-                <a:spcPts val="0"/>
-              </a:spcBef>
-              <a:spcAft>
-                <a:spcPts val="0"/>
-              </a:spcAft>
-            </a:pPr>
-            <a:r>
-              <a:rPr sz="1650" b="0">
+              <a:t>Teacher Analytics</a:t>
+            </a:r>
+          </a:p>
+          <a:p>
+            <a:pPr algn="l">
+              <a:spcBef>
+                <a:spcPts val="0"/>
+              </a:spcBef>
+              <a:spcAft>
+                <a:spcPts val="0"/>
+              </a:spcAft>
+            </a:pPr>
+            <a:r>
+              <a:rPr sz="1600" b="0">
                 <a:solidFill>
                   <a:srgbClr val="334155"/>
                 </a:solidFill>
                 <a:latin typeface="Calibri"/>
               </a:rPr>
-              <a:t>Score: 10%  •  Guardrail blocks answer leak and redirects learner to the video clip.</a:t>
-            </a:r>
-          </a:p>
-        </p:txBody>
-      </p:sp>
-      <p:sp>
-        <p:nvSpPr>
-          <p:cNvPr id="12" name="Rounded Rectangle 11"/>
+              <a:t>Shows which 45s clip confused the class most.</a:t>
+            </a:r>
+          </a:p>
+        </p:txBody>
+      </p:sp>
+      <p:sp>
+        <p:nvSpPr>
+          <p:cNvPr id="14" name="Rounded Rectangle 13"/>
           <p:cNvSpPr/>
           <p:nvPr/>
         </p:nvSpPr>
         <p:spPr>
           <a:xfrm>
-            <a:off x="8074152" y="2103120"/>
-            <a:ext cx="3429000" cy="3429000"/>
+            <a:off x="8970264" y="2103120"/>
+            <a:ext cx="2542032" cy="3429000"/>
           </a:xfrm>
           <a:prstGeom prst="roundRect">
             <a:avLst>
@@ -10019,14 +9382,14 @@
       </p:sp>
       <p:sp>
         <p:nvSpPr>
-          <p:cNvPr id="13" name="TextBox 12"/>
+          <p:cNvPr id="15" name="TextBox 14"/>
           <p:cNvSpPr txBox="1"/>
           <p:nvPr/>
         </p:nvSpPr>
         <p:spPr>
           <a:xfrm>
-            <a:off x="8348472" y="2377440"/>
-            <a:ext cx="2880360" cy="2834640"/>
+            <a:off x="9189720" y="2377440"/>
+            <a:ext cx="2103120" cy="2834640"/>
           </a:xfrm>
           <a:prstGeom prst="rect">
             <a:avLst/>
@@ -10048,13 +9411,13 @@
               </a:spcAft>
             </a:pPr>
             <a:r>
-              <a:rPr sz="1300" b="1">
+              <a:rPr sz="1200" b="1">
                 <a:solidFill>
                   <a:srgbClr val="059669"/>
                 </a:solidFill>
                 <a:latin typeface="Calibri"/>
               </a:rPr>
-              <a:t>REAL EXPLANATION</a:t>
+              <a:t>04 • MULTILINGUAL</a:t>
             </a:r>
           </a:p>
           <a:p>
@@ -10067,39 +9430,39 @@
               </a:spcAft>
             </a:pPr>
             <a:r>
-              <a:rPr sz="2400" b="1">
+              <a:rPr sz="2200" b="1">
                 <a:solidFill>
                   <a:srgbClr val="0F172A"/>
                 </a:solidFill>
                 <a:latin typeface="Calibri"/>
               </a:rPr>
-              <a:t>Covers Core Principle</a:t>
-            </a:r>
-          </a:p>
-          <a:p>
-            <a:pPr algn="l">
-              <a:spcBef>
-                <a:spcPts val="0"/>
-              </a:spcBef>
-              <a:spcAft>
-                <a:spcPts val="0"/>
-              </a:spcAft>
-            </a:pPr>
-            <a:r>
-              <a:rPr sz="1650" b="0">
+              <a:t>Cross-Lingual Mode</a:t>
+            </a:r>
+          </a:p>
+          <a:p>
+            <a:pPr algn="l">
+              <a:spcBef>
+                <a:spcPts val="0"/>
+              </a:spcBef>
+              <a:spcAft>
+                <a:spcPts val="0"/>
+              </a:spcAft>
+            </a:pPr>
+            <a:r>
+              <a:rPr sz="1600" b="0">
                 <a:solidFill>
                   <a:srgbClr val="334155"/>
                 </a:solidFill>
                 <a:latin typeface="Calibri"/>
               </a:rPr>
-              <a:t>Score: 92%  •  Verified against segment rubric; unlocks Step 4 Transfer Check.</a:t>
-            </a:r>
-          </a:p>
-        </p:txBody>
-      </p:sp>
-      <p:sp>
-        <p:nvSpPr>
-          <p:cNvPr id="14" name="Rounded Rectangle 13"/>
+              <a:t>Watch in English, explain in Urdu or local language.</a:t>
+            </a:r>
+          </a:p>
+        </p:txBody>
+      </p:sp>
+      <p:sp>
+        <p:nvSpPr>
+          <p:cNvPr id="16" name="Rounded Rectangle 15"/>
           <p:cNvSpPr/>
           <p:nvPr/>
         </p:nvSpPr>
@@ -10114,11 +9477,11 @@
             </a:avLst>
           </a:prstGeom>
           <a:solidFill>
-            <a:srgbClr val="ECFDF5"/>
+            <a:srgbClr val="EEF2FF"/>
           </a:solidFill>
           <a:ln w="19050">
             <a:solidFill>
-              <a:srgbClr val="6EE7B7"/>
+              <a:srgbClr val="A5B4FC"/>
             </a:solidFill>
           </a:ln>
         </p:spPr>
@@ -10146,7 +9509,7 @@
       </p:sp>
       <p:sp>
         <p:nvSpPr>
-          <p:cNvPr id="15" name="TextBox 14"/>
+          <p:cNvPr id="17" name="TextBox 16"/>
           <p:cNvSpPr txBox="1"/>
           <p:nvPr/>
         </p:nvSpPr>
@@ -10177,11 +9540,11 @@
             <a:r>
               <a:rPr sz="1600" b="1">
                 <a:solidFill>
-                  <a:srgbClr val="059669"/>
-                </a:solidFill>
-                <a:latin typeface="Calibri"/>
-              </a:rPr>
-              <a:t>Tracks First-Attempt Independence Rate (Solved Without Hints) vs. Assisted Mastery.</a:t>
+                  <a:srgbClr val="4F46E5"/>
+                </a:solidFill>
+                <a:latin typeface="Calibri"/>
+              </a:rPr>
+              <a:t>Vision: Turn every educational video into an interactive, Socratic tutor.</a:t>
             </a:r>
           </a:p>
         </p:txBody>
@@ -10299,7 +9662,7 @@
         <p:spPr>
           <a:xfrm>
             <a:off x="685800" y="411480"/>
-            <a:ext cx="2286000" cy="347472"/>
+            <a:ext cx="2377440" cy="347472"/>
           </a:xfrm>
           <a:prstGeom prst="roundRect">
             <a:avLst>
@@ -10348,7 +9711,7 @@
                 </a:solidFill>
                 <a:latin typeface="Calibri"/>
               </a:rPr>
-              <a:t>08 • FUTURE ROADMAP</a:t>
+              <a:t>08 • LIVE DEMO</a:t>
             </a:r>
           </a:p>
         </p:txBody>
@@ -10390,7 +9753,7 @@
                 </a:solidFill>
                 <a:latin typeface="Calibri"/>
               </a:rPr>
-              <a:t>ClipGenie  •  09 / 10</a:t>
+              <a:t>ClipGenie  •  09 / 09</a:t>
             </a:r>
           </a:p>
         </p:txBody>
@@ -10432,7 +9795,7 @@
                 </a:solidFill>
                 <a:latin typeface="Calibri"/>
               </a:rPr>
-              <a:t>Where ClipGenie Goes Next</a:t>
+              <a:t>Live Demonstration Walkthrough</a:t>
             </a:r>
           </a:p>
         </p:txBody>
@@ -10474,7 +9837,7 @@
                 </a:solidFill>
                 <a:latin typeface="Calibri"/>
               </a:rPr>
-              <a:t>Scaling from an individual study studio to classroom-wide active learning.</a:t>
+              <a:t>Seeing ClipGenie in action on real video lectures.</a:t>
             </a:r>
           </a:p>
         </p:txBody>
@@ -10488,7 +9851,7 @@
         <p:spPr>
           <a:xfrm>
             <a:off x="685800" y="2103120"/>
-            <a:ext cx="2542032" cy="3429000"/>
+            <a:ext cx="3429000" cy="3429000"/>
           </a:xfrm>
           <a:prstGeom prst="roundRect">
             <a:avLst>
@@ -10534,8 +9897,8 @@
         </p:nvSpPr>
         <p:spPr>
           <a:xfrm>
-            <a:off x="905256" y="2377440"/>
-            <a:ext cx="2103120" cy="2834640"/>
+            <a:off x="960120" y="2377440"/>
+            <a:ext cx="2880360" cy="2834640"/>
           </a:xfrm>
           <a:prstGeom prst="rect">
             <a:avLst/>
@@ -10557,13 +9920,13 @@
               </a:spcAft>
             </a:pPr>
             <a:r>
-              <a:rPr sz="1200" b="1">
+              <a:rPr sz="1400" b="1">
                 <a:solidFill>
                   <a:srgbClr val="4F46E5"/>
                 </a:solidFill>
                 <a:latin typeface="Calibri"/>
               </a:rPr>
-              <a:t>01 • VOICE VIVA</a:t>
+              <a:t>DEMO 1</a:t>
             </a:r>
           </a:p>
           <a:p>
@@ -10576,32 +9939,32 @@
               </a:spcAft>
             </a:pPr>
             <a:r>
-              <a:rPr sz="2200" b="1">
+              <a:rPr sz="2500" b="1">
                 <a:solidFill>
                   <a:srgbClr val="0F172A"/>
                 </a:solidFill>
                 <a:latin typeface="Calibri"/>
               </a:rPr>
-              <a:t>Speak Explanations Out Loud</a:t>
-            </a:r>
-          </a:p>
-          <a:p>
-            <a:pPr algn="l">
-              <a:spcBef>
-                <a:spcPts val="0"/>
-              </a:spcBef>
-              <a:spcAft>
-                <a:spcPts val="0"/>
-              </a:spcAft>
-            </a:pPr>
-            <a:r>
-              <a:rPr sz="1600" b="0">
+              <a:t>Load &amp; Watch Clip</a:t>
+            </a:r>
+          </a:p>
+          <a:p>
+            <a:pPr algn="l">
+              <a:spcBef>
+                <a:spcPts val="0"/>
+              </a:spcBef>
+              <a:spcAft>
+                <a:spcPts val="0"/>
+              </a:spcAft>
+            </a:pPr>
+            <a:r>
+              <a:rPr sz="1700" b="0">
                 <a:solidFill>
                   <a:srgbClr val="334155"/>
                 </a:solidFill>
                 <a:latin typeface="Calibri"/>
               </a:rPr>
-              <a:t>Hands-free oral practice via microphone.</a:t>
+              <a:t>Switch or import a lecture &amp; play a clamped chapter.</a:t>
             </a:r>
           </a:p>
         </p:txBody>
@@ -10614,8 +9977,8 @@
         </p:nvSpPr>
         <p:spPr>
           <a:xfrm>
-            <a:off x="3447288" y="2103120"/>
-            <a:ext cx="2542032" cy="3429000"/>
+            <a:off x="4379976" y="2103120"/>
+            <a:ext cx="3429000" cy="3429000"/>
           </a:xfrm>
           <a:prstGeom prst="roundRect">
             <a:avLst>
@@ -10661,8 +10024,8 @@
         </p:nvSpPr>
         <p:spPr>
           <a:xfrm>
-            <a:off x="3666744" y="2377440"/>
-            <a:ext cx="2103120" cy="2834640"/>
+            <a:off x="4654296" y="2377440"/>
+            <a:ext cx="2880360" cy="2834640"/>
           </a:xfrm>
           <a:prstGeom prst="rect">
             <a:avLst/>
@@ -10684,13 +10047,13 @@
               </a:spcAft>
             </a:pPr>
             <a:r>
-              <a:rPr sz="1200" b="1">
+              <a:rPr sz="1400" b="1">
                 <a:solidFill>
                   <a:srgbClr val="D97706"/>
                 </a:solidFill>
                 <a:latin typeface="Calibri"/>
               </a:rPr>
-              <a:t>02 • SPACED REVIEW</a:t>
+              <a:t>DEMO 2</a:t>
             </a:r>
           </a:p>
           <a:p>
@@ -10703,32 +10066,32 @@
               </a:spcAft>
             </a:pPr>
             <a:r>
-              <a:rPr sz="2200" b="1">
+              <a:rPr sz="2500" b="1">
                 <a:solidFill>
                   <a:srgbClr val="0F172A"/>
                 </a:solidFill>
                 <a:latin typeface="Calibri"/>
               </a:rPr>
-              <a:t>1–3–7 Day Video Queue</a:t>
-            </a:r>
-          </a:p>
-          <a:p>
-            <a:pPr algn="l">
-              <a:spcBef>
-                <a:spcPts val="0"/>
-              </a:spcBef>
-              <a:spcAft>
-                <a:spcPts val="0"/>
-              </a:spcAft>
-            </a:pPr>
-            <a:r>
-              <a:rPr sz="1600" b="0">
+              <a:t>Explain &amp; Diagnose</a:t>
+            </a:r>
+          </a:p>
+          <a:p>
+            <a:pPr algn="l">
+              <a:spcBef>
+                <a:spcPts val="0"/>
+              </a:spcBef>
+              <a:spcAft>
+                <a:spcPts val="0"/>
+              </a:spcAft>
+            </a:pPr>
+            <a:r>
+              <a:rPr sz="1700" b="0">
                 <a:solidFill>
                   <a:srgbClr val="334155"/>
                 </a:solidFill>
                 <a:latin typeface="Calibri"/>
               </a:rPr>
-              <a:t>Auto-schedules weak clips to beat forgetting.</a:t>
+              <a:t>Write an explanation &amp; see zero-spoiler gap feedback.</a:t>
             </a:r>
           </a:p>
         </p:txBody>
@@ -10741,135 +10104,8 @@
         </p:nvSpPr>
         <p:spPr>
           <a:xfrm>
-            <a:off x="6208776" y="2103120"/>
-            <a:ext cx="2542032" cy="3429000"/>
-          </a:xfrm>
-          <a:prstGeom prst="roundRect">
-            <a:avLst>
-              <a:gd name="adj" fmla="val 4000"/>
-            </a:avLst>
-          </a:prstGeom>
-          <a:solidFill>
-            <a:srgbClr val="FFF1F2"/>
-          </a:solidFill>
-          <a:ln w="25400">
-            <a:solidFill>
-              <a:srgbClr val="FDA4AF"/>
-            </a:solidFill>
-          </a:ln>
-        </p:spPr>
-        <p:style>
-          <a:lnRef idx="1">
-            <a:schemeClr val="accent1"/>
-          </a:lnRef>
-          <a:fillRef idx="3">
-            <a:schemeClr val="accent1"/>
-          </a:fillRef>
-          <a:effectRef idx="2">
-            <a:schemeClr val="accent1"/>
-          </a:effectRef>
-          <a:fontRef idx="minor">
-            <a:schemeClr val="lt1"/>
-          </a:fontRef>
-        </p:style>
-        <p:txBody>
-          <a:bodyPr rtlCol="0" anchor="ctr"/>
-          <a:lstStyle/>
-          <a:p>
-            <a:pPr algn="ctr"/>
-          </a:p>
-        </p:txBody>
-      </p:sp>
-      <p:sp>
-        <p:nvSpPr>
-          <p:cNvPr id="13" name="TextBox 12"/>
-          <p:cNvSpPr txBox="1"/>
-          <p:nvPr/>
-        </p:nvSpPr>
-        <p:spPr>
-          <a:xfrm>
-            <a:off x="6428232" y="2377440"/>
-            <a:ext cx="2103120" cy="2834640"/>
-          </a:xfrm>
-          <a:prstGeom prst="rect">
-            <a:avLst/>
-          </a:prstGeom>
-          <a:noFill/>
-        </p:spPr>
-        <p:txBody>
-          <a:bodyPr wrap="square">
-            <a:spAutoFit/>
-          </a:bodyPr>
-          <a:lstStyle/>
-          <a:p>
-            <a:pPr algn="l">
-              <a:spcBef>
-                <a:spcPts val="0"/>
-              </a:spcBef>
-              <a:spcAft>
-                <a:spcPts val="800"/>
-              </a:spcAft>
-            </a:pPr>
-            <a:r>
-              <a:rPr sz="1200" b="1">
-                <a:solidFill>
-                  <a:srgbClr val="E11D48"/>
-                </a:solidFill>
-                <a:latin typeface="Calibri"/>
-              </a:rPr>
-              <a:t>03 • LMS HEATMAPS</a:t>
-            </a:r>
-          </a:p>
-          <a:p>
-            <a:pPr algn="l">
-              <a:spcBef>
-                <a:spcPts val="0"/>
-              </a:spcBef>
-              <a:spcAft>
-                <a:spcPts val="1200"/>
-              </a:spcAft>
-            </a:pPr>
-            <a:r>
-              <a:rPr sz="2200" b="1">
-                <a:solidFill>
-                  <a:srgbClr val="0F172A"/>
-                </a:solidFill>
-                <a:latin typeface="Calibri"/>
-              </a:rPr>
-              <a:t>Teacher Confusion Analytics</a:t>
-            </a:r>
-          </a:p>
-          <a:p>
-            <a:pPr algn="l">
-              <a:spcBef>
-                <a:spcPts val="0"/>
-              </a:spcBef>
-              <a:spcAft>
-                <a:spcPts val="0"/>
-              </a:spcAft>
-            </a:pPr>
-            <a:r>
-              <a:rPr sz="1600" b="0">
-                <a:solidFill>
-                  <a:srgbClr val="334155"/>
-                </a:solidFill>
-                <a:latin typeface="Calibri"/>
-              </a:rPr>
-              <a:t>Shows which 45s clip confused the class most.</a:t>
-            </a:r>
-          </a:p>
-        </p:txBody>
-      </p:sp>
-      <p:sp>
-        <p:nvSpPr>
-          <p:cNvPr id="14" name="Rounded Rectangle 13"/>
-          <p:cNvSpPr/>
-          <p:nvPr/>
-        </p:nvSpPr>
-        <p:spPr>
-          <a:xfrm>
-            <a:off x="8970264" y="2103120"/>
-            <a:ext cx="2542032" cy="3429000"/>
+            <a:off x="8074152" y="2103120"/>
+            <a:ext cx="3429000" cy="3429000"/>
           </a:xfrm>
           <a:prstGeom prst="roundRect">
             <a:avLst>
@@ -10909,14 +10145,14 @@
       </p:sp>
       <p:sp>
         <p:nvSpPr>
-          <p:cNvPr id="15" name="TextBox 14"/>
+          <p:cNvPr id="13" name="TextBox 12"/>
           <p:cNvSpPr txBox="1"/>
           <p:nvPr/>
         </p:nvSpPr>
         <p:spPr>
           <a:xfrm>
-            <a:off x="9189720" y="2377440"/>
-            <a:ext cx="2103120" cy="2834640"/>
+            <a:off x="8348472" y="2377440"/>
+            <a:ext cx="2880360" cy="2834640"/>
           </a:xfrm>
           <a:prstGeom prst="rect">
             <a:avLst/>
@@ -10938,13 +10174,13 @@
               </a:spcAft>
             </a:pPr>
             <a:r>
-              <a:rPr sz="1200" b="1">
+              <a:rPr sz="1400" b="1">
                 <a:solidFill>
                   <a:srgbClr val="059669"/>
                 </a:solidFill>
                 <a:latin typeface="Calibri"/>
               </a:rPr>
-              <a:t>04 • MULTILINGUAL</a:t>
+              <a:t>DEMO 3</a:t>
             </a:r>
           </a:p>
           <a:p>
@@ -10957,39 +10193,39 @@
               </a:spcAft>
             </a:pPr>
             <a:r>
-              <a:rPr sz="2200" b="1">
+              <a:rPr sz="2500" b="1">
                 <a:solidFill>
                   <a:srgbClr val="0F172A"/>
                 </a:solidFill>
                 <a:latin typeface="Calibri"/>
               </a:rPr>
-              <a:t>Cross-Lingual &amp; Offline Mode</a:t>
-            </a:r>
-          </a:p>
-          <a:p>
-            <a:pPr algn="l">
-              <a:spcBef>
-                <a:spcPts val="0"/>
-              </a:spcBef>
-              <a:spcAft>
-                <a:spcPts val="0"/>
-              </a:spcAft>
-            </a:pPr>
-            <a:r>
-              <a:rPr sz="1600" b="0">
+              <a:t>Retry &amp; Transfer</a:t>
+            </a:r>
+          </a:p>
+          <a:p>
+            <a:pPr algn="l">
+              <a:spcBef>
+                <a:spcPts val="0"/>
+              </a:spcBef>
+              <a:spcAft>
+                <a:spcPts val="0"/>
+              </a:spcAft>
+            </a:pPr>
+            <a:r>
+              <a:rPr sz="1700" b="0">
                 <a:solidFill>
                   <a:srgbClr val="334155"/>
                 </a:solidFill>
                 <a:latin typeface="Calibri"/>
               </a:rPr>
-              <a:t>Watch in English, explain in Urdu or local language.</a:t>
-            </a:r>
-          </a:p>
-        </p:txBody>
-      </p:sp>
-      <p:sp>
-        <p:nvSpPr>
-          <p:cNvPr id="16" name="Rounded Rectangle 15"/>
+              <a:t>Close the gap (+Delta) &amp; pass the Cold Transfer Check.</a:t>
+            </a:r>
+          </a:p>
+        </p:txBody>
+      </p:sp>
+      <p:sp>
+        <p:nvSpPr>
+          <p:cNvPr id="14" name="Rounded Rectangle 13"/>
           <p:cNvSpPr/>
           <p:nvPr/>
         </p:nvSpPr>
@@ -11004,11 +10240,11 @@
             </a:avLst>
           </a:prstGeom>
           <a:solidFill>
-            <a:srgbClr val="EEF2FF"/>
+            <a:srgbClr val="ECFDF5"/>
           </a:solidFill>
           <a:ln w="19050">
             <a:solidFill>
-              <a:srgbClr val="A5B4FC"/>
+              <a:srgbClr val="6EE7B7"/>
             </a:solidFill>
           </a:ln>
         </p:spPr>
@@ -11036,7 +10272,7 @@
       </p:sp>
       <p:sp>
         <p:nvSpPr>
-          <p:cNvPr id="17" name="TextBox 16"/>
+          <p:cNvPr id="15" name="TextBox 14"/>
           <p:cNvSpPr txBox="1"/>
           <p:nvPr/>
         </p:nvSpPr>
@@ -11067,11 +10303,11 @@
             <a:r>
               <a:rPr sz="1600" b="1">
                 <a:solidFill>
-                  <a:srgbClr val="4F46E5"/>
-                </a:solidFill>
-                <a:latin typeface="Calibri"/>
-              </a:rPr>
-              <a:t>Vision: Turn every educational video into an interactive, Socratic tutor.</a:t>
+                  <a:srgbClr val="059669"/>
+                </a:solidFill>
+                <a:latin typeface="Calibri"/>
+              </a:rPr>
+              <a:t>"Don't just watch it. Explain it, close the gap, and prove you know it."   •   Thank You!</a:t>
             </a:r>
           </a:p>
         </p:txBody>
